--- a/SURVIVAL RATIO PLOTS_For survey Draft.pptx
+++ b/SURVIVAL RATIO PLOTS_For survey Draft.pptx
@@ -218,7 +218,7 @@
           <a:p>
             <a:fld id="{CC981156-0E71-4C1D-9793-3A4334B26402}" type="datetimeFigureOut">
               <a:rPr lang="en-US" smtClean="0"/>
-              <a:t>2/26/2025</a:t>
+              <a:t>3/2/2025</a:t>
             </a:fld>
             <a:endParaRPr lang="en-US"/>
           </a:p>
@@ -884,7 +884,7 @@
           <a:p>
             <a:fld id="{E11CEBBC-63BD-404B-AFC0-81AF74A99657}" type="datetimeFigureOut">
               <a:rPr lang="en-US" smtClean="0"/>
-              <a:t>2/26/2025</a:t>
+              <a:t>3/2/2025</a:t>
             </a:fld>
             <a:endParaRPr lang="en-US"/>
           </a:p>
@@ -1082,7 +1082,7 @@
           <a:p>
             <a:fld id="{E11CEBBC-63BD-404B-AFC0-81AF74A99657}" type="datetimeFigureOut">
               <a:rPr lang="en-US" smtClean="0"/>
-              <a:t>2/26/2025</a:t>
+              <a:t>3/2/2025</a:t>
             </a:fld>
             <a:endParaRPr lang="en-US"/>
           </a:p>
@@ -1290,7 +1290,7 @@
           <a:p>
             <a:fld id="{E11CEBBC-63BD-404B-AFC0-81AF74A99657}" type="datetimeFigureOut">
               <a:rPr lang="en-US" smtClean="0"/>
-              <a:t>2/26/2025</a:t>
+              <a:t>3/2/2025</a:t>
             </a:fld>
             <a:endParaRPr lang="en-US"/>
           </a:p>
@@ -1488,7 +1488,7 @@
           <a:p>
             <a:fld id="{E11CEBBC-63BD-404B-AFC0-81AF74A99657}" type="datetimeFigureOut">
               <a:rPr lang="en-US" smtClean="0"/>
-              <a:t>2/26/2025</a:t>
+              <a:t>3/2/2025</a:t>
             </a:fld>
             <a:endParaRPr lang="en-US"/>
           </a:p>
@@ -1763,7 +1763,7 @@
           <a:p>
             <a:fld id="{E11CEBBC-63BD-404B-AFC0-81AF74A99657}" type="datetimeFigureOut">
               <a:rPr lang="en-US" smtClean="0"/>
-              <a:t>2/26/2025</a:t>
+              <a:t>3/2/2025</a:t>
             </a:fld>
             <a:endParaRPr lang="en-US"/>
           </a:p>
@@ -2028,7 +2028,7 @@
           <a:p>
             <a:fld id="{E11CEBBC-63BD-404B-AFC0-81AF74A99657}" type="datetimeFigureOut">
               <a:rPr lang="en-US" smtClean="0"/>
-              <a:t>2/26/2025</a:t>
+              <a:t>3/2/2025</a:t>
             </a:fld>
             <a:endParaRPr lang="en-US"/>
           </a:p>
@@ -2440,7 +2440,7 @@
           <a:p>
             <a:fld id="{E11CEBBC-63BD-404B-AFC0-81AF74A99657}" type="datetimeFigureOut">
               <a:rPr lang="en-US" smtClean="0"/>
-              <a:t>2/26/2025</a:t>
+              <a:t>3/2/2025</a:t>
             </a:fld>
             <a:endParaRPr lang="en-US"/>
           </a:p>
@@ -2581,7 +2581,7 @@
           <a:p>
             <a:fld id="{E11CEBBC-63BD-404B-AFC0-81AF74A99657}" type="datetimeFigureOut">
               <a:rPr lang="en-US" smtClean="0"/>
-              <a:t>2/26/2025</a:t>
+              <a:t>3/2/2025</a:t>
             </a:fld>
             <a:endParaRPr lang="en-US"/>
           </a:p>
@@ -2694,7 +2694,7 @@
           <a:p>
             <a:fld id="{E11CEBBC-63BD-404B-AFC0-81AF74A99657}" type="datetimeFigureOut">
               <a:rPr lang="en-US" smtClean="0"/>
-              <a:t>2/26/2025</a:t>
+              <a:t>3/2/2025</a:t>
             </a:fld>
             <a:endParaRPr lang="en-US"/>
           </a:p>
@@ -3005,7 +3005,7 @@
           <a:p>
             <a:fld id="{E11CEBBC-63BD-404B-AFC0-81AF74A99657}" type="datetimeFigureOut">
               <a:rPr lang="en-US" smtClean="0"/>
-              <a:t>2/26/2025</a:t>
+              <a:t>3/2/2025</a:t>
             </a:fld>
             <a:endParaRPr lang="en-US"/>
           </a:p>
@@ -3293,7 +3293,7 @@
           <a:p>
             <a:fld id="{E11CEBBC-63BD-404B-AFC0-81AF74A99657}" type="datetimeFigureOut">
               <a:rPr lang="en-US" smtClean="0"/>
-              <a:t>2/26/2025</a:t>
+              <a:t>3/2/2025</a:t>
             </a:fld>
             <a:endParaRPr lang="en-US"/>
           </a:p>
@@ -3534,7 +3534,7 @@
           <a:p>
             <a:fld id="{E11CEBBC-63BD-404B-AFC0-81AF74A99657}" type="datetimeFigureOut">
               <a:rPr lang="en-US" smtClean="0"/>
-              <a:t>2/26/2025</a:t>
+              <a:t>3/2/2025</a:t>
             </a:fld>
             <a:endParaRPr lang="en-US"/>
           </a:p>
@@ -6093,8 +6093,8 @@
         </p:blipFill>
         <p:spPr>
           <a:xfrm>
-            <a:off x="838200" y="2351683"/>
-            <a:ext cx="5181600" cy="3299222"/>
+            <a:off x="838200" y="2164080"/>
+            <a:ext cx="5476240" cy="3486825"/>
           </a:xfrm>
         </p:spPr>
       </p:pic>
